--- a/docs/교재/통합반_오프라인/02회차/통합반_오프라인_02회차.pptx
+++ b/docs/교재/통합반_오프라인/02회차/통합반_오프라인_02회차.pptx
@@ -7272,7 +7272,7 @@
       </p:sp>
       <p:pic>
         <p:nvPicPr>
-          <p:cNvPr id="6" name="삽화:두층_3.svg" descr="illust_5440418165663486189_1791717240.png"/>
+          <p:cNvPr id="6" name="삽화:두층_3.svg" descr="illust_3645234326495076585_1791717240.png"/>
           <p:cNvPicPr>
             <a:picLocks noChangeAspect="1"/>
           </p:cNvPicPr>
@@ -8382,7 +8382,7 @@
       </p:sp>
       <p:pic>
         <p:nvPicPr>
-          <p:cNvPr id="6" name="삽화:카디널리티.svg" descr="illust_3470750710045051163_1791717240.png"/>
+          <p:cNvPr id="6" name="삽화:카디널리티.svg" descr="illust_6948407665886383190_1791717240.png"/>
           <p:cNvPicPr>
             <a:picLocks noChangeAspect="1"/>
           </p:cNvPicPr>
@@ -9478,7 +9478,7 @@
       </p:sp>
       <p:pic>
         <p:nvPicPr>
-          <p:cNvPr id="6" name="삽화:연결조건_2.svg" descr="illust_7275588874269350455_1791717240.png"/>
+          <p:cNvPr id="6" name="삽화:연결조건_2.svg" descr="illust_4898341205899748450_1791717240.png"/>
           <p:cNvPicPr>
             <a:picLocks noChangeAspect="1"/>
           </p:cNvPicPr>
@@ -10645,7 +10645,7 @@
                 <a:ea typeface="맑은 고딕"/>
                 <a:cs typeface="맑은 고딕"/>
               </a:rPr>
-              <a:t>• kind는 세 값 가운데 하나이다</a:t>
+              <a:t>• kind는 manipulated, controlled, disturbance 가운데 하나이다</a:t>
             </a:r>
           </a:p>
         </p:txBody>
@@ -12048,7 +12048,7 @@
       </p:sp>
       <p:pic>
         <p:nvPicPr>
-          <p:cNvPr id="6" name="삽화:속성그래프_3.svg" descr="illust_7355381629665306853_1791717240.png"/>
+          <p:cNvPr id="6" name="삽화:속성그래프_3.svg" descr="illust_2504410089274462770_1791717240.png"/>
           <p:cNvPicPr>
             <a:picLocks noChangeAspect="1"/>
           </p:cNvPicPr>
@@ -15643,7 +15643,7 @@
       </p:sp>
       <p:pic>
         <p:nvPicPr>
-          <p:cNvPr id="6" name="삽화:표기_3.svg" descr="illust_5746464610909409164_1791717240.png"/>
+          <p:cNvPr id="6" name="삽화:표기_3.svg" descr="illust_7396081657258740216_1791717240.png"/>
           <p:cNvPicPr>
             <a:picLocks noChangeAspect="1"/>
           </p:cNvPicPr>
@@ -19772,7 +19772,7 @@
       </p:sp>
       <p:pic>
         <p:nvPicPr>
-          <p:cNvPr id="6" name="삽화:SOP문서_all.svg" descr="illust_5757737901880478056_1791717219.png"/>
+          <p:cNvPr id="6" name="삽화:SOP문서_all.svg" descr="illust_2431311883037967694_1791717219.png"/>
           <p:cNvPicPr>
             <a:picLocks noChangeAspect="1"/>
           </p:cNvPicPr>
@@ -32410,7 +32410,7 @@
       </p:sp>
       <p:pic>
         <p:nvPicPr>
-          <p:cNvPr id="6" name="삽화:여러노드.svg" descr="illust_9155272719395410366_1791717240.png"/>
+          <p:cNvPr id="6" name="삽화:여러노드.svg" descr="illust_2530627585710995126_1791717240.png"/>
           <p:cNvPicPr>
             <a:picLocks noChangeAspect="1"/>
           </p:cNvPicPr>

--- a/docs/교재/통합반_오프라인/02회차/통합반_오프라인_02회차.pptx
+++ b/docs/교재/통합반_오프라인/02회차/통합반_오프라인_02회차.pptx
@@ -7343,7 +7343,7 @@
       </p:sp>
       <p:pic>
         <p:nvPicPr>
-          <p:cNvPr id="6" name="삽화:두층_3.svg" descr="illust_6709761097328224023_1791717240.png"/>
+          <p:cNvPr id="6" name="삽화:두층_3.svg" descr="illust_7850676041919049866_1791717240.png"/>
           <p:cNvPicPr>
             <a:picLocks noChangeAspect="1"/>
           </p:cNvPicPr>
@@ -8453,7 +8453,7 @@
       </p:sp>
       <p:pic>
         <p:nvPicPr>
-          <p:cNvPr id="6" name="삽화:카디널리티.svg" descr="illust_5717449102835992377_1791717240.png"/>
+          <p:cNvPr id="6" name="삽화:카디널리티.svg" descr="illust_7245927864282093230_1791717240.png"/>
           <p:cNvPicPr>
             <a:picLocks noChangeAspect="1"/>
           </p:cNvPicPr>
@@ -9549,7 +9549,7 @@
       </p:sp>
       <p:pic>
         <p:nvPicPr>
-          <p:cNvPr id="6" name="삽화:연결조건_2.svg" descr="illust_3870473278901663958_1791717240.png"/>
+          <p:cNvPr id="6" name="삽화:연결조건_2.svg" descr="illust_8096866119968875291_1791717240.png"/>
           <p:cNvPicPr>
             <a:picLocks noChangeAspect="1"/>
           </p:cNvPicPr>
@@ -12119,7 +12119,7 @@
       </p:sp>
       <p:pic>
         <p:nvPicPr>
-          <p:cNvPr id="6" name="삽화:속성그래프_3.svg" descr="illust_4699477044819397509_1791717240.png"/>
+          <p:cNvPr id="6" name="삽화:속성그래프_3.svg" descr="illust_3345705084012822745_1791717240.png"/>
           <p:cNvPicPr>
             <a:picLocks noChangeAspect="1"/>
           </p:cNvPicPr>
@@ -15714,7 +15714,7 @@
       </p:sp>
       <p:pic>
         <p:nvPicPr>
-          <p:cNvPr id="6" name="삽화:표기_3.svg" descr="illust_6841714067996973060_1791717240.png"/>
+          <p:cNvPr id="6" name="삽화:표기_3.svg" descr="illust_6531960928449600113_1791717240.png"/>
           <p:cNvPicPr>
             <a:picLocks noChangeAspect="1"/>
           </p:cNvPicPr>
@@ -19843,7 +19843,7 @@
       </p:sp>
       <p:pic>
         <p:nvPicPr>
-          <p:cNvPr id="6" name="삽화:SOP문서_all.svg" descr="illust_4954929966552150185_1791770880.png"/>
+          <p:cNvPr id="6" name="삽화:SOP문서_all.svg" descr="illust_4327082991796282290_1791770880.png"/>
           <p:cNvPicPr>
             <a:picLocks noChangeAspect="1"/>
           </p:cNvPicPr>
@@ -29738,7 +29738,7 @@
                 <a:ea typeface="맑은 고딕"/>
                 <a:cs typeface="맑은 고딕"/>
               </a:rPr>
-              <a:t>배운 내용을 바탕으로 정답을 맞춰보세요.</a:t>
+              <a:t>배운 내용을 바탕으로 정답을 맞혀 보세요.</a:t>
             </a:r>
           </a:p>
         </p:txBody>
@@ -33344,7 +33344,7 @@
       </p:sp>
       <p:pic>
         <p:nvPicPr>
-          <p:cNvPr id="6" name="삽화:여러노드.svg" descr="illust_6315455871086540103_1791717240.png"/>
+          <p:cNvPr id="6" name="삽화:여러노드.svg" descr="illust_4911912655705947432_1791717240.png"/>
           <p:cNvPicPr>
             <a:picLocks noChangeAspect="1"/>
           </p:cNvPicPr>

--- a/docs/교재/통합반_오프라인/02회차/통합반_오프라인_02회차.pptx
+++ b/docs/교재/통합반_오프라인/02회차/통합반_오프라인_02회차.pptx
@@ -1803,7 +1803,7 @@
           <a:lstStyle/>
           <a:p>
             <a:r>
-              <a:t>지난 시간에 만든 schema.json을 제공된 설비, 부품, 센서 자료로 이어서 보완합니다. 같은 대상이 두 번 들어가지 않게 하는 규칙도 함께 정합니다. 정의한 내용을 Claude Code에 요구사항으로 전달해 파일을 만들게 합니다. 무엇을 클래스로 두고 무엇을 속성으로 둘지를 정하는 일은 설계하는 사람의 몫입니다.</a:t>
+              <a:t>지난 시간에 만든 schema.json을 제공된 설비, 부품, 센서 자료로 이어서 보완합니다. 같은 대상이 두 번 들어가지 않게 하는 규칙도 함께 정합니다. 정의한 내용을 AI에게 요구사항으로 전달해 바이브 코딩으로 파일을 만듭니다. 무엇을 클래스로 두고 무엇을 속성으로 둘지를 정하는 일은 설계하는 사람의 몫입니다.</a:t>
             </a:r>
           </a:p>
         </p:txBody>
@@ -1873,7 +1873,7 @@
           <a:lstStyle/>
           <a:p>
             <a:r>
-              <a:t>앞에서 설계한 것을 그래프 DB에 넣습니다. Claude Code가 만든 질의를 실행하기 전에 읽어 봅니다. 노드를 식별자로 MERGE하는지, 관계의 방향이 스키마의 정의와 같은지는 오늘 배운 것으로 확인할 수 있습니다. 넣은 뒤에는 MATCH로 노드와 관계의 수를 세어 설계한 수와 같은지 봅니다.</a:t>
+              <a:t>앞에서 설계한 것을 그래프 DB에 넣습니다. AI가 만든 질의를 실행하기 전에 읽어 봅니다. 노드를 식별자로 MERGE하는지, 관계의 방향이 스키마의 정의와 같은지는 오늘 배운 것으로 확인할 수 있습니다. 넣은 뒤에는 MATCH로 노드와 관계의 수를 세어 설계한 수와 같은지 봅니다.</a:t>
             </a:r>
           </a:p>
         </p:txBody>
@@ -7343,7 +7343,7 @@
       </p:sp>
       <p:pic>
         <p:nvPicPr>
-          <p:cNvPr id="6" name="삽화:두층_3.svg" descr="illust_7850676041919049866_1791717240.png"/>
+          <p:cNvPr id="6" name="삽화:두층_3.svg" descr="illust_4365969645189973067_1791717240.png"/>
           <p:cNvPicPr>
             <a:picLocks noChangeAspect="1"/>
           </p:cNvPicPr>
@@ -8453,7 +8453,7 @@
       </p:sp>
       <p:pic>
         <p:nvPicPr>
-          <p:cNvPr id="6" name="삽화:카디널리티.svg" descr="illust_7245927864282093230_1791717240.png"/>
+          <p:cNvPr id="6" name="삽화:카디널리티.svg" descr="illust_8977841634738413075_1791717240.png"/>
           <p:cNvPicPr>
             <a:picLocks noChangeAspect="1"/>
           </p:cNvPicPr>
@@ -9549,7 +9549,7 @@
       </p:sp>
       <p:pic>
         <p:nvPicPr>
-          <p:cNvPr id="6" name="삽화:연결조건_2.svg" descr="illust_8096866119968875291_1791717240.png"/>
+          <p:cNvPr id="6" name="삽화:연결조건_2.svg" descr="illust_7808984459424331242_1791717240.png"/>
           <p:cNvPicPr>
             <a:picLocks noChangeAspect="1"/>
           </p:cNvPicPr>
@@ -12119,7 +12119,7 @@
       </p:sp>
       <p:pic>
         <p:nvPicPr>
-          <p:cNvPr id="6" name="삽화:속성그래프_3.svg" descr="illust_3345705084012822745_1791717240.png"/>
+          <p:cNvPr id="6" name="삽화:속성그래프_3.svg" descr="illust_5579647656124735666_1791717240.png"/>
           <p:cNvPicPr>
             <a:picLocks noChangeAspect="1"/>
           </p:cNvPicPr>
@@ -15714,7 +15714,7 @@
       </p:sp>
       <p:pic>
         <p:nvPicPr>
-          <p:cNvPr id="6" name="삽화:표기_3.svg" descr="illust_6531960928449600113_1791717240.png"/>
+          <p:cNvPr id="6" name="삽화:표기_3.svg" descr="illust_5097971199186121838_1791717240.png"/>
           <p:cNvPicPr>
             <a:picLocks noChangeAspect="1"/>
           </p:cNvPicPr>
@@ -19843,7 +19843,7 @@
       </p:sp>
       <p:pic>
         <p:nvPicPr>
-          <p:cNvPr id="6" name="삽화:SOP문서_all.svg" descr="illust_4327082991796282290_1791770880.png"/>
+          <p:cNvPr id="6" name="삽화:SOP문서_all.svg" descr="illust_658223827825459043_1791770880.png"/>
           <p:cNvPicPr>
             <a:picLocks noChangeAspect="1"/>
           </p:cNvPicPr>
@@ -33344,7 +33344,7 @@
       </p:sp>
       <p:pic>
         <p:nvPicPr>
-          <p:cNvPr id="6" name="삽화:여러노드.svg" descr="illust_4911912655705947432_1791717240.png"/>
+          <p:cNvPr id="6" name="삽화:여러노드.svg" descr="illust_979467260903655166_1791717240.png"/>
           <p:cNvPicPr>
             <a:picLocks noChangeAspect="1"/>
           </p:cNvPicPr>
